--- a/practice/bai-3-thuong-mai.pptx
+++ b/practice/bai-3-thuong-mai.pptx
@@ -1851,7 +1851,7 @@
       </p:sp>
       <p:pic>
         <p:nvPicPr>
-          <p:cNvPr id="3" name="Image 0" descr="/home/user/comdraft/assets/img/dau-huong.png">    </p:cNvPr>
+          <p:cNvPr id="3" name="Image 0" descr="/home/user/ComDraft/assets/img/dau-huong.png">    </p:cNvPr>
           <p:cNvPicPr>
             <a:picLocks noChangeAspect="1"/>
           </p:cNvPicPr>
@@ -1877,7 +1877,7 @@
       </p:pic>
       <p:pic>
         <p:nvPicPr>
-          <p:cNvPr id="4" name="Image 1" descr="/home/user/comdraft/assets/img/lockup-huong.png">    </p:cNvPr>
+          <p:cNvPr id="4" name="Image 1" descr="/home/user/ComDraft/assets/img/lockup-huong.png">    </p:cNvPr>
           <p:cNvPicPr>
             <a:picLocks noChangeAspect="1"/>
           </p:cNvPicPr>
@@ -2152,30 +2152,6 @@
           </a:p>
         </p:txBody>
       </p:sp>
-      <p:pic>
-        <p:nvPicPr>
-          <p:cNvPr id="11" name="Picture 10" descr="co-huong-doc.png"/>
-          <p:cNvPicPr>
-            <a:picLocks noChangeAspect="1"/>
-          </p:cNvPicPr>
-          <p:nvPr/>
-        </p:nvPicPr>
-        <p:blipFill>
-          <a:blip r:embed="rId5"/>
-          <a:stretch>
-            <a:fillRect/>
-          </a:stretch>
-        </p:blipFill>
-        <p:spPr>
-          <a:xfrm>
-            <a:off x="8641080" y="1051560"/>
-            <a:ext cx="3279624" cy="5120640"/>
-          </a:xfrm>
-          <a:prstGeom prst="rect">
-            <a:avLst/>
-          </a:prstGeom>
-        </p:spPr>
-      </p:pic>
     </p:spTree>
   </p:cSld>
   <p:clrMapOvr>
@@ -2210,7 +2186,7 @@
       </p:grpSpPr>
       <p:pic>
         <p:nvPicPr>
-          <p:cNvPr id="2" name="Image 0" descr="/home/user/comdraft/assets/img/dau-huong.png">    </p:cNvPr>
+          <p:cNvPr id="2" name="Image 0" descr="/home/user/ComDraft/assets/img/dau-huong.png">    </p:cNvPr>
           <p:cNvPicPr>
             <a:picLocks noChangeAspect="1"/>
           </p:cNvPicPr>
@@ -2746,7 +2722,7 @@
       </p:grpSpPr>
       <p:pic>
         <p:nvPicPr>
-          <p:cNvPr id="2" name="Image 0" descr="/home/user/comdraft/assets/img/dau-huong.png">    </p:cNvPr>
+          <p:cNvPr id="2" name="Image 0" descr="/home/user/ComDraft/assets/img/dau-huong.png">    </p:cNvPr>
           <p:cNvPicPr>
             <a:picLocks noChangeAspect="1"/>
           </p:cNvPicPr>
@@ -3282,7 +3258,7 @@
       </p:grpSpPr>
       <p:pic>
         <p:nvPicPr>
-          <p:cNvPr id="2" name="Image 0" descr="/home/user/comdraft/assets/img/dau-huong.png">    </p:cNvPr>
+          <p:cNvPr id="2" name="Image 0" descr="/home/user/ComDraft/assets/img/dau-huong.png">    </p:cNvPr>
           <p:cNvPicPr>
             <a:picLocks noChangeAspect="1"/>
           </p:cNvPicPr>
@@ -3905,7 +3881,7 @@
       </p:grpSpPr>
       <p:pic>
         <p:nvPicPr>
-          <p:cNvPr id="2" name="Image 0" descr="/home/user/comdraft/assets/img/dau-huong.png">    </p:cNvPr>
+          <p:cNvPr id="2" name="Image 0" descr="/home/user/ComDraft/assets/img/dau-huong.png">    </p:cNvPr>
           <p:cNvPicPr>
             <a:picLocks noChangeAspect="1"/>
           </p:cNvPicPr>
@@ -4528,7 +4504,7 @@
       </p:grpSpPr>
       <p:pic>
         <p:nvPicPr>
-          <p:cNvPr id="2" name="Image 0" descr="/home/user/comdraft/assets/img/dau-huong.png">    </p:cNvPr>
+          <p:cNvPr id="2" name="Image 0" descr="/home/user/ComDraft/assets/img/dau-huong.png">    </p:cNvPr>
           <p:cNvPicPr>
             <a:picLocks noChangeAspect="1"/>
           </p:cNvPicPr>
@@ -5338,7 +5314,7 @@
       </p:grpSpPr>
       <p:pic>
         <p:nvPicPr>
-          <p:cNvPr id="2" name="Image 0" descr="/home/user/comdraft/assets/img/dau-huong.png">    </p:cNvPr>
+          <p:cNvPr id="2" name="Image 0" descr="/home/user/ComDraft/assets/img/dau-huong.png">    </p:cNvPr>
           <p:cNvPicPr>
             <a:picLocks noChangeAspect="1"/>
           </p:cNvPicPr>
@@ -5672,7 +5648,7 @@
       </p:grpSpPr>
       <p:pic>
         <p:nvPicPr>
-          <p:cNvPr id="2" name="Image 0" descr="/home/user/comdraft/assets/img/dau-huong.png">    </p:cNvPr>
+          <p:cNvPr id="2" name="Image 0" descr="/home/user/ComDraft/assets/img/dau-huong.png">    </p:cNvPr>
           <p:cNvPicPr>
             <a:picLocks noChangeAspect="1"/>
           </p:cNvPicPr>
@@ -6295,7 +6271,7 @@
       </p:grpSpPr>
       <p:pic>
         <p:nvPicPr>
-          <p:cNvPr id="2" name="Image 0" descr="/home/user/comdraft/assets/img/dau-huong.png">    </p:cNvPr>
+          <p:cNvPr id="2" name="Image 0" descr="/home/user/ComDraft/assets/img/dau-huong.png">    </p:cNvPr>
           <p:cNvPicPr>
             <a:picLocks noChangeAspect="1"/>
           </p:cNvPicPr>
@@ -6594,7 +6570,7 @@
       </p:grpSpPr>
       <p:pic>
         <p:nvPicPr>
-          <p:cNvPr id="2" name="Image 0" descr="/home/user/comdraft/assets/img/dau-huong.png">    </p:cNvPr>
+          <p:cNvPr id="2" name="Image 0" descr="/home/user/ComDraft/assets/img/dau-huong.png">    </p:cNvPr>
           <p:cNvPicPr>
             <a:picLocks noChangeAspect="1"/>
           </p:cNvPicPr>
@@ -7130,7 +7106,7 @@
       </p:grpSpPr>
       <p:pic>
         <p:nvPicPr>
-          <p:cNvPr id="2" name="Image 0" descr="/home/user/comdraft/assets/img/dau-huong.png">    </p:cNvPr>
+          <p:cNvPr id="2" name="Image 0" descr="/home/user/ComDraft/assets/img/dau-huong.png">    </p:cNvPr>
           <p:cNvPicPr>
             <a:picLocks noChangeAspect="1"/>
           </p:cNvPicPr>
@@ -7803,30 +7779,6 @@
           </a:p>
         </p:txBody>
       </p:sp>
-      <p:pic>
-        <p:nvPicPr>
-          <p:cNvPr id="21" name="Picture 20" descr="co-huong-tron.png"/>
-          <p:cNvPicPr>
-            <a:picLocks noChangeAspect="1"/>
-          </p:cNvPicPr>
-          <p:nvPr/>
-        </p:nvPicPr>
-        <p:blipFill>
-          <a:blip r:embed="rId4"/>
-          <a:stretch>
-            <a:fillRect/>
-          </a:stretch>
-        </p:blipFill>
-        <p:spPr>
-          <a:xfrm>
-            <a:off x="10378440" y="384048"/>
-            <a:ext cx="960120" cy="960120"/>
-          </a:xfrm>
-          <a:prstGeom prst="rect">
-            <a:avLst/>
-          </a:prstGeom>
-        </p:spPr>
-      </p:pic>
     </p:spTree>
   </p:cSld>
   <p:clrMapOvr>
